--- a/19-slide-deck.pptx
+++ b/19-slide-deck.pptx
@@ -6508,7 +6508,7 @@
               </a:defRPr>
             </a:pPr>
             <a:r>
-              <a:t>•  Itseisännöinti ei ole automaattisesti halvin polku — sen perusta lepää hallinnalla ja riippumattomuudella, ei vähittäishinnan alittamisella [TULKINTA]</a:t>
+              <a:t>•  Itsehostaus ei ole automaattisesti halvin polku — sen perusta lepää hallinnalla ja riippumattomuudella, ei vähittäishinnan alittamisella [TULKINTA]</a:t>
             </a:r>
           </a:p>
         </p:txBody>
@@ -7527,7 +7527,7 @@
               </a:defRPr>
             </a:pPr>
             <a:r>
-              <a:t>•  Kaksi erillistä kysymystä: voidaanko kapasiteetti luoda (kustannus-/käyttöastemalli) vs. voiko se luoda ja vallata uutta arvoa (keksintö, hyväksynta, tulomalli)</a:t>
+              <a:t>•  Kaksi erillistä kysymystä: voidaanko kapasiteetti luoda (kustannus-/käyttöastemalli) vs. voiko se luoda ja kaapata uutta arvoa (keksintö, käyttäjien hyväksyntä, tulomalli)</a:t>
             </a:r>
           </a:p>
           <a:p>
